--- a/materialien/Welt3_Maschinenzeitalter/1_Praesentation/KR_W3_Praesentation_Maschinenzeitalter.pptx
+++ b/materialien/Welt3_Maschinenzeitalter/1_Praesentation/KR_W3_Praesentation_Maschinenzeitalter.pptx
@@ -134,7 +134,7 @@
   <p:extLst>
     <p:ext uri="{521415D9-36F7-43E2-AB2F-B90AF26B5E84}">
       <p14:sectionLst xmlns:p14="http://schemas.microsoft.com/office/powerpoint/2010/main">
-        <p14:section name="DS 9 · Vernam" id="{20759268-8332-d516-697c-701013ae2eac}">
+        <p14:section name="DS 9 · Vernam" id="{f57399ef-294a-ae03-4b58-a0f84936eb76}">
           <p14:sldIdLst>
             <p14:sldId id="256"/>
             <p14:sldId id="257"/>
@@ -150,7 +150,7 @@
             <p14:sldId id="267"/>
           </p14:sldIdLst>
         </p14:section>
-        <p14:section name="DS 10 · Blockchiffre" id="{a02afb97-dd4e-cb0b-628f-dd5024377073}">
+        <p14:section name="DS 10 · Blockchiffre" id="{2890688e-8934-87f4-932f-8e6a5e510d30}">
           <p14:sldIdLst>
             <p14:sldId id="268"/>
             <p14:sldId id="269"/>
@@ -162,7 +162,7 @@
             <p14:sldId id="275"/>
           </p14:sldIdLst>
         </p14:section>
-        <p14:section name="DS 11 · Werkstatt" id="{76882849-d672-b811-7d5f-cef5c7845610}">
+        <p14:section name="DS 11 · Werkstatt" id="{a85e8c69-c03f-b035-d7e8-2a1a759b8dd4}">
           <p14:sldIdLst>
             <p14:sldId id="276"/>
             <p14:sldId id="277"/>
@@ -170,7 +170,7 @@
             <p14:sldId id="279"/>
           </p14:sldIdLst>
         </p14:section>
-        <p14:section name="DS 11 · ADFGVX" id="{49dd23dd-19b6-64cd-41c0-eefd41d9dc44}">
+        <p14:section name="DS 11 · ADFGVX" id="{da1fd780-1578-c23e-9161-10624182b9e3}">
           <p14:sldIdLst>
             <p14:sldId id="280"/>
             <p14:sldId id="281"/>
@@ -2652,7 +2652,7 @@
           <a:p>
             <a:r>
               <a:rPr lang="en-US" dirty="0"/>
-              <a:t>12 min. Lösungen: A1 B 0100 0010, O 0100 1111, J 0100 1010, E 0100 0101; W, H. A2 1010 1100 und 0000 0000 (a ⊕ a = 0). A3 Geheimtext 0010 1011 · 1011 1111 · 0111 1001 · 1110 0000.
+              <a:t>12 min. Lösungen: A1 Q 0101 0001, Y 0101 1001, „4“ 0011 0100, „7“ 0011 0111; W, H. A2 1101 0001 und 0000 0000 (a ⊕ a = 0). A3 Geheimtext 1010 0101 · 0111 0110 · 1101 1001 · 0001 1001.
 Schnelle: Auftrag 6 (Sparversion).
 Typischer Fehler: A = 1 statt 65 (P1).</a:t>
             </a:r>
@@ -4174,7 +4174,7 @@
                 <a:ea typeface="Consolas" pitchFamily="34" charset="-122"/>
                 <a:cs typeface="Consolas" pitchFamily="34" charset="-120"/>
               </a:rPr>
-              <a:t>WELT 3 · 1917 – 1977 · FUNK &amp; FERNSCHREIBER</a:t>
+              <a:t>WELT 3 · 1917 – 1977 · MASCHINEN &amp; FERNSCHREIBER</a:t>
             </a:r>
             <a:endParaRPr lang="en-US" sz="1600" dirty="0"/>
           </a:p>
@@ -32541,7 +32541,7 @@
                   <a:srgbClr val="1B1B1F"/>
                 </a:solidFill>
               </a:rPr>
-              <a:t>1.  ASCII-Werte und Bits von B, O, J, E</a:t>
+              <a:t>1.  ASCII-Werte und Bits von Q, Y, 4, 7</a:t>
             </a:r>
             <a:endParaRPr lang="en-US" sz="2200" dirty="0"/>
           </a:p>
@@ -32588,7 +32588,7 @@
                 <a:ea typeface="Consolas" pitchFamily="34" charset="-122"/>
                 <a:cs typeface="Consolas" pitchFamily="34" charset="-120"/>
               </a:rPr>
-              <a:t>1100 1010 ⊕ 0110 0110</a:t>
+              <a:t>1100 1010 ⊕ 0001 1011</a:t>
             </a:r>
             <a:endParaRPr lang="en-US" sz="2200" dirty="0"/>
           </a:p>

--- a/materialien/Welt3_Maschinenzeitalter/1_Praesentation/KR_W3_Praesentation_Maschinenzeitalter.pptx
+++ b/materialien/Welt3_Maschinenzeitalter/1_Praesentation/KR_W3_Praesentation_Maschinenzeitalter.pptx
@@ -33,9 +33,11 @@
     <p:sldId id="281" r:id="rId27"/>
     <p:sldId id="282" r:id="rId28"/>
     <p:sldId id="283" r:id="rId29"/>
+    <p:sldId id="284" r:id="rId30"/>
+    <p:sldId id="285" r:id="rId31"/>
   </p:sldIdLst>
   <p:notesMasterIdLst>
-    <p:notesMasterId r:id="rId30"/>
+    <p:notesMasterId r:id="rId32"/>
   </p:notesMasterIdLst>
   <p:sldSz cx="12192000" cy="6858000"/>
   <p:notesSz cx="6858000" cy="12192000"/>
@@ -134,7 +136,7 @@
   <p:extLst>
     <p:ext uri="{521415D9-36F7-43E2-AB2F-B90AF26B5E84}">
       <p14:sectionLst xmlns:p14="http://schemas.microsoft.com/office/powerpoint/2010/main">
-        <p14:section name="DS 9 · Vernam" id="{f57399ef-294a-ae03-4b58-a0f84936eb76}">
+        <p14:section name="DS 9 · Vernam" id="{47b2d271-b1b5-0bed-f2a5-cfc40bb0afc9}">
           <p14:sldIdLst>
             <p14:sldId id="256"/>
             <p14:sldId id="257"/>
@@ -150,7 +152,7 @@
             <p14:sldId id="267"/>
           </p14:sldIdLst>
         </p14:section>
-        <p14:section name="DS 10 · Blockchiffre" id="{2890688e-8934-87f4-932f-8e6a5e510d30}">
+        <p14:section name="DS 10 · Blockchiffre" id="{cd00c5f2-f540-3641-a731-45ab57b348c5}">
           <p14:sldIdLst>
             <p14:sldId id="268"/>
             <p14:sldId id="269"/>
@@ -162,7 +164,7 @@
             <p14:sldId id="275"/>
           </p14:sldIdLst>
         </p14:section>
-        <p14:section name="DS 11 · Werkstatt" id="{a85e8c69-c03f-b035-d7e8-2a1a759b8dd4}">
+        <p14:section name="DS 11 · Werkstatt" id="{3bba3509-fdad-216b-ebee-59cac4278596}">
           <p14:sldIdLst>
             <p14:sldId id="276"/>
             <p14:sldId id="277"/>
@@ -170,12 +172,18 @@
             <p14:sldId id="279"/>
           </p14:sldIdLst>
         </p14:section>
-        <p14:section name="DS 11 · ADFGVX" id="{da1fd780-1578-c23e-9161-10624182b9e3}">
+        <p14:section name="DS 11 · ADFGVX" id="{4918fe61-7094-8486-af68-b147f3bcd6fa}">
           <p14:sldIdLst>
             <p14:sldId id="280"/>
             <p14:sldId id="281"/>
             <p14:sldId id="282"/>
             <p14:sldId id="283"/>
+          </p14:sldIdLst>
+        </p14:section>
+        <p14:section name="Kür K2 · Die Enigma" id="{ef5db72b-1cf5-4b10-99b3-ba3fe46377eb}">
+          <p14:sldIdLst>
+            <p14:sldId id="284"/>
+            <p14:sldId id="285"/>
           </p14:sldIdLst>
         </p14:section>
       </p14:sectionLst>
@@ -2424,6 +2432,94 @@
 </p:notes>
 </file>
 
+<file path=ppt/notesSlides/notesSlide29.xml><?xml version="1.0" encoding="utf-8"?>
+<p:notes xmlns:a="http://schemas.openxmlformats.org/drawingml/2006/main" xmlns:r="http://schemas.openxmlformats.org/officeDocument/2006/relationships" xmlns:p="http://schemas.openxmlformats.org/presentationml/2006/main">
+  <p:cSld>
+    <p:spTree>
+      <p:nvGrpSpPr>
+        <p:cNvPr id="1" name=""/>
+        <p:cNvGrpSpPr/>
+        <p:nvPr/>
+      </p:nvGrpSpPr>
+      <p:grpSpPr>
+        <a:xfrm>
+          <a:off x="0" y="0"/>
+          <a:ext cx="0" cy="0"/>
+          <a:chOff x="0" y="0"/>
+          <a:chExt cx="0" cy="0"/>
+        </a:xfrm>
+      </p:grpSpPr>
+      <p:sp>
+        <p:nvSpPr>
+          <p:cNvPr id="2" name="Slide Image Placeholder 1"/>
+          <p:cNvSpPr>
+            <a:spLocks noGrp="1" noRot="1" noChangeAspect="1"/>
+          </p:cNvSpPr>
+          <p:nvPr>
+            <p:ph type="sldImg"/>
+          </p:nvPr>
+        </p:nvSpPr>
+        <p:spPr/>
+      </p:sp>
+      <p:sp>
+        <p:nvSpPr>
+          <p:cNvPr id="3" name="Notes Placeholder 2"/>
+          <p:cNvSpPr>
+            <a:spLocks noGrp="1"/>
+          </p:cNvSpPr>
+          <p:nvPr>
+            <p:ph type="body" idx="1"/>
+          </p:nvPr>
+        </p:nvSpPr>
+        <p:spPr/>
+        <p:txBody>
+          <a:bodyPr/>
+          <a:lstStyle/>
+          <a:p>
+            <a:r>
+              <a:rPr lang="en-US" dirty="0"/>
+              <a:t>Zusatzfolie (M10, L58): Objektbild aus dem Kryptolabor, erzeugt mit `npm run labor:bilder`. 3 min. Kür-Werkzeug „Enigma“, Reiter Maschine; Beispiel mit 10 Kabeln aus dem Tagesschlüssel.</a:t>
+            </a:r>
+            <a:endParaRPr lang="en-US" dirty="0"/>
+          </a:p>
+        </p:txBody>
+      </p:sp>
+      <p:sp>
+        <p:nvSpPr>
+          <p:cNvPr id="4" name="Slide Number Placeholder 3"/>
+          <p:cNvSpPr>
+            <a:spLocks noGrp="1"/>
+          </p:cNvSpPr>
+          <p:nvPr>
+            <p:ph type="sldNum" sz="quarter" idx="10"/>
+          </p:nvPr>
+        </p:nvSpPr>
+        <p:spPr/>
+        <p:txBody>
+          <a:bodyPr/>
+          <a:lstStyle/>
+          <a:p>
+            <a:fld id="{F7021451-1387-4CA6-816F-3879F97B5CBC}" type="slidenum">
+              <a:rPr lang="en-US"/>
+              <a:t>29</a:t>
+            </a:fld>
+            <a:endParaRPr lang="en-US"/>
+          </a:p>
+        </p:txBody>
+      </p:sp>
+    </p:spTree>
+    <p:extLst>
+      <p:ext uri="{BB962C8B-B14F-4D97-AF65-F5344CB8AC3E}">
+        <p14:creationId xmlns:p14="http://schemas.microsoft.com/office/powerpoint/2010/main" val="1024086991"/>
+      </p:ext>
+    </p:extLst>
+  </p:cSld>
+  <p:clrMapOvr>
+    <a:masterClrMapping/>
+  </p:clrMapOvr>
+</p:notes>
+</file>
+
 <file path=ppt/notesSlides/notesSlide3.xml><?xml version="1.0" encoding="utf-8"?>
 <p:notes xmlns:a="http://schemas.openxmlformats.org/drawingml/2006/main" xmlns:r="http://schemas.openxmlformats.org/officeDocument/2006/relationships" xmlns:p="http://schemas.openxmlformats.org/presentationml/2006/main">
   <p:cSld>
@@ -2497,6 +2593,94 @@
             <a:fld id="{F7021451-1387-4CA6-816F-3879F97B5CBC}" type="slidenum">
               <a:rPr lang="en-US"/>
               <a:t>3</a:t>
+            </a:fld>
+            <a:endParaRPr lang="en-US"/>
+          </a:p>
+        </p:txBody>
+      </p:sp>
+    </p:spTree>
+    <p:extLst>
+      <p:ext uri="{BB962C8B-B14F-4D97-AF65-F5344CB8AC3E}">
+        <p14:creationId xmlns:p14="http://schemas.microsoft.com/office/powerpoint/2010/main" val="1024086991"/>
+      </p:ext>
+    </p:extLst>
+  </p:cSld>
+  <p:clrMapOvr>
+    <a:masterClrMapping/>
+  </p:clrMapOvr>
+</p:notes>
+</file>
+
+<file path=ppt/notesSlides/notesSlide30.xml><?xml version="1.0" encoding="utf-8"?>
+<p:notes xmlns:a="http://schemas.openxmlformats.org/drawingml/2006/main" xmlns:r="http://schemas.openxmlformats.org/officeDocument/2006/relationships" xmlns:p="http://schemas.openxmlformats.org/presentationml/2006/main">
+  <p:cSld>
+    <p:spTree>
+      <p:nvGrpSpPr>
+        <p:cNvPr id="1" name=""/>
+        <p:cNvGrpSpPr/>
+        <p:nvPr/>
+      </p:nvGrpSpPr>
+      <p:grpSpPr>
+        <a:xfrm>
+          <a:off x="0" y="0"/>
+          <a:ext cx="0" cy="0"/>
+          <a:chOff x="0" y="0"/>
+          <a:chExt cx="0" cy="0"/>
+        </a:xfrm>
+      </p:grpSpPr>
+      <p:sp>
+        <p:nvSpPr>
+          <p:cNvPr id="2" name="Slide Image Placeholder 1"/>
+          <p:cNvSpPr>
+            <a:spLocks noGrp="1" noRot="1" noChangeAspect="1"/>
+          </p:cNvSpPr>
+          <p:nvPr>
+            <p:ph type="sldImg"/>
+          </p:nvPr>
+        </p:nvSpPr>
+        <p:spPr/>
+      </p:sp>
+      <p:sp>
+        <p:nvSpPr>
+          <p:cNvPr id="3" name="Notes Placeholder 2"/>
+          <p:cNvSpPr>
+            <a:spLocks noGrp="1"/>
+          </p:cNvSpPr>
+          <p:nvPr>
+            <p:ph type="body" idx="1"/>
+          </p:nvPr>
+        </p:nvSpPr>
+        <p:spPr/>
+        <p:txBody>
+          <a:bodyPr/>
+          <a:lstStyle/>
+          <a:p>
+            <a:r>
+              <a:rPr lang="en-US" dirty="0"/>
+              <a:t>Zusatzfolie (M10, L58): Objektbild aus dem Kryptolabor, erzeugt mit `npm run labor:bilder`. 3 min. Reiter Innenleben; im Level K2 sichtbar, „Vorführen“ dort ausgeblendet.</a:t>
+            </a:r>
+            <a:endParaRPr lang="en-US" dirty="0"/>
+          </a:p>
+        </p:txBody>
+      </p:sp>
+      <p:sp>
+        <p:nvSpPr>
+          <p:cNvPr id="4" name="Slide Number Placeholder 3"/>
+          <p:cNvSpPr>
+            <a:spLocks noGrp="1"/>
+          </p:cNvSpPr>
+          <p:nvPr>
+            <p:ph type="sldNum" sz="quarter" idx="10"/>
+          </p:nvPr>
+        </p:nvSpPr>
+        <p:spPr/>
+        <p:txBody>
+          <a:bodyPr/>
+          <a:lstStyle/>
+          <a:p>
+            <a:fld id="{F7021451-1387-4CA6-816F-3879F97B5CBC}" type="slidenum">
+              <a:rPr lang="en-US"/>
+              <a:t>30</a:t>
             </a:fld>
             <a:endParaRPr lang="en-US"/>
           </a:p>
@@ -28621,6 +28805,213 @@
 </p:sld>
 </file>
 
+<file path=ppt/slides/slide29.xml><?xml version="1.0" encoding="utf-8"?>
+<p:sld xmlns:a="http://schemas.openxmlformats.org/drawingml/2006/main" xmlns:r="http://schemas.openxmlformats.org/officeDocument/2006/relationships" xmlns:p="http://schemas.openxmlformats.org/presentationml/2006/main">
+  <p:cSld name="Slide 29">
+    <p:spTree>
+      <p:nvGrpSpPr>
+        <p:cNvPr id="1" name=""/>
+        <p:cNvGrpSpPr/>
+        <p:nvPr/>
+      </p:nvGrpSpPr>
+      <p:grpSpPr>
+        <a:xfrm>
+          <a:off x="0" y="0"/>
+          <a:ext cx="0" cy="0"/>
+          <a:chOff x="0" y="0"/>
+          <a:chExt cx="0" cy="0"/>
+        </a:xfrm>
+      </p:grpSpPr>
+      <p:sp>
+        <p:nvSpPr>
+          <p:cNvPr id="2" name="Text 0"/>
+          <p:cNvSpPr/>
+          <p:nvPr>
+            <p:ph idx="101" type="title" hasCustomPrompt="1"/>
+          </p:nvPr>
+        </p:nvSpPr>
+        <p:spPr>
+          <a:xfrm>
+            <a:off x="1325880" y="347472"/>
+            <a:ext cx="10317175" cy="658368"/>
+          </a:xfrm>
+          <a:prstGeom prst="rect">
+            <a:avLst/>
+          </a:prstGeom>
+          <a:noFill/>
+          <a:ln/>
+        </p:spPr>
+        <p:txBody>
+          <a:bodyPr wrap="square" lIns="0" tIns="0" rIns="0" bIns="0" rtlCol="0" anchor="ctr"/>
+          <a:lstStyle/>
+          <a:p>
+            <a:pPr algn="l" indent="0" marL="0">
+              <a:buNone/>
+            </a:pPr>
+            <a:r>
+              <a:rPr lang="en-US" sz="3000" b="1" dirty="0">
+                <a:solidFill>
+                  <a:srgbClr val="14213D"/>
+                </a:solidFill>
+                <a:latin typeface="Georgia" pitchFamily="34" charset="0"/>
+                <a:ea typeface="Georgia" pitchFamily="34" charset="-122"/>
+                <a:cs typeface="Georgia" pitchFamily="34" charset="-120"/>
+              </a:rPr>
+              <a:t>Kür: die Enigma im Kryptolabor</a:t>
+            </a:r>
+            <a:endParaRPr lang="en-US" sz="3000" dirty="0"/>
+          </a:p>
+        </p:txBody>
+      </p:sp>
+      <p:sp>
+        <p:nvSpPr>
+          <p:cNvPr id="3" name="Text 1"/>
+          <p:cNvSpPr txBox="1"/>
+          <p:nvPr/>
+        </p:nvSpPr>
+        <p:spPr>
+          <a:xfrm>
+            <a:off x="548640" y="1325880"/>
+            <a:ext cx="11094415" cy="293624"/>
+          </a:xfrm>
+          <a:prstGeom prst="rect">
+            <a:avLst/>
+          </a:prstGeom>
+          <a:noFill/>
+          <a:ln/>
+        </p:spPr>
+        <p:txBody>
+          <a:bodyPr wrap="square" lIns="0" tIns="0" rIns="0" bIns="0" rtlCol="0" anchor="t"/>
+          <a:lstStyle/>
+          <a:p>
+            <a:pPr algn="l" indent="0" marL="0">
+              <a:buNone/>
+            </a:pPr>
+            <a:r>
+              <a:rPr lang="en-US" sz="1600" dirty="0">
+                <a:solidFill>
+                  <a:srgbClr val="1B1B1F"/>
+                </a:solidFill>
+              </a:rPr>
+              <a:t>Tagesschlüssel einstellen, Tasten drücken, Lampen ablesen: Vor jedem Buchstaben dreht sich die rechte Walze.</a:t>
+            </a:r>
+            <a:endParaRPr lang="en-US" sz="1600" dirty="0"/>
+          </a:p>
+        </p:txBody>
+      </p:sp>
+      <p:pic>
+        <p:nvPicPr>
+          <p:cNvPr id="4" name="Image 0" descr="bild">    </p:cNvPr>
+          <p:cNvPicPr>
+            <a:picLocks noChangeAspect="1"/>
+          </p:cNvPicPr>
+          <p:nvPr/>
+        </p:nvPicPr>
+        <p:blipFill>
+          <a:blip r:embed="rId1"/>
+          <a:stretch>
+            <a:fillRect/>
+          </a:stretch>
+        </p:blipFill>
+        <p:spPr>
+          <a:xfrm>
+            <a:off x="2712568" y="1747520"/>
+            <a:ext cx="6766560" cy="3806190"/>
+          </a:xfrm>
+          <a:prstGeom prst="rect">
+            <a:avLst/>
+          </a:prstGeom>
+        </p:spPr>
+      </p:pic>
+      <p:sp>
+        <p:nvSpPr>
+          <p:cNvPr id="5" name="Text 2"/>
+          <p:cNvSpPr txBox="1"/>
+          <p:nvPr/>
+        </p:nvSpPr>
+        <p:spPr>
+          <a:xfrm>
+            <a:off x="548640" y="5590286"/>
+            <a:ext cx="11094415" cy="274320"/>
+          </a:xfrm>
+          <a:prstGeom prst="rect">
+            <a:avLst/>
+          </a:prstGeom>
+          <a:noFill/>
+          <a:ln/>
+        </p:spPr>
+        <p:txBody>
+          <a:bodyPr wrap="square" lIns="0" tIns="0" rIns="0" bIns="0" rtlCol="0" anchor="ctr"/>
+          <a:lstStyle/>
+          <a:p>
+            <a:pPr algn="ctr" indent="0" marL="0">
+              <a:buNone/>
+            </a:pPr>
+            <a:r>
+              <a:rPr lang="en-US" sz="1200" i="1" dirty="0">
+                <a:solidFill>
+                  <a:srgbClr val="4A4A55"/>
+                </a:solidFill>
+              </a:rPr>
+              <a:t>Kryptolabor · Ideen von A. Bodendiek (Krypto-Werkstatt)</a:t>
+            </a:r>
+            <a:endParaRPr lang="en-US" sz="1200" dirty="0"/>
+          </a:p>
+        </p:txBody>
+      </p:sp>
+      <p:sp>
+        <p:nvSpPr>
+          <p:cNvPr id="25" name="Slide Number Placeholder 0"/>
+          <p:cNvSpPr>
+            <a:spLocks noGrp="1"/>
+          </p:cNvSpPr>
+          <p:nvPr>
+            <p:ph type="sldNum" sz="quarter" idx="4294967295"/>
+          </p:nvPr>
+        </p:nvSpPr>
+        <p:spPr>
+          <a:xfrm>
+            <a:off x="11155680" y="6419088"/>
+            <a:ext cx="502920" cy="274320"/>
+          </a:xfrm>
+          <a:prstGeom prst="rect">
+            <a:avLst/>
+          </a:prstGeom>
+          <a:extLst>
+            <a:ext uri="{C572A759-6A51-4108-AA02-DFA0A04FC94B}">
+              <ma14:wrappingTextBoxFlag xmlns:ma14="http://schemas.microsoft.com/office/mac/drawingml/2011/main" val="0"/>
+            </a:ext>
+          </a:extLst>
+        </p:spPr>
+        <p:txBody>
+          <a:bodyPr/>
+          <a:lstStyle>
+            <a:lvl1pPr>
+              <a:defRPr sz="1000">
+                <a:solidFill>
+                  <a:srgbClr val="4A4A55"/>
+                </a:solidFill>
+              </a:defRPr>
+            </a:lvl1pPr>
+          </a:lstStyle>
+          <a:p>
+            <a:pPr algn="r"/>
+            <a:fld id="{F7021451-1387-4CA6-816F-3879F97B5CBC}" type="slidenum">
+              <a:rPr b="0" lang="en-US"/>
+              <a:t>29</a:t>
+            </a:fld>
+            <a:endParaRPr lang="en-US"/>
+          </a:p>
+        </p:txBody>
+      </p:sp>
+    </p:spTree>
+  </p:cSld>
+  <p:clrMapOvr>
+    <a:masterClrMapping/>
+  </p:clrMapOvr>
+</p:sld>
+</file>
+
 <file path=ppt/slides/slide3.xml><?xml version="1.0" encoding="utf-8"?>
 <p:sld xmlns:a="http://schemas.openxmlformats.org/drawingml/2006/main" xmlns:r="http://schemas.openxmlformats.org/officeDocument/2006/relationships" xmlns:p="http://schemas.openxmlformats.org/presentationml/2006/main">
   <p:cSld name="Slide 3">
@@ -30769,6 +31160,229 @@
             <a:fld id="{F7021451-1387-4CA6-816F-3879F97B5CBC}" type="slidenum">
               <a:rPr b="0" lang="en-US"/>
               <a:t>3</a:t>
+            </a:fld>
+            <a:endParaRPr lang="en-US"/>
+          </a:p>
+        </p:txBody>
+      </p:sp>
+    </p:spTree>
+  </p:cSld>
+  <p:clrMapOvr>
+    <a:masterClrMapping/>
+  </p:clrMapOvr>
+</p:sld>
+</file>
+
+<file path=ppt/slides/slide30.xml><?xml version="1.0" encoding="utf-8"?>
+<p:sld xmlns:a="http://schemas.openxmlformats.org/drawingml/2006/main" xmlns:r="http://schemas.openxmlformats.org/officeDocument/2006/relationships" xmlns:p="http://schemas.openxmlformats.org/presentationml/2006/main">
+  <p:cSld name="Slide 30">
+    <p:spTree>
+      <p:nvGrpSpPr>
+        <p:cNvPr id="1" name=""/>
+        <p:cNvGrpSpPr/>
+        <p:nvPr/>
+      </p:nvGrpSpPr>
+      <p:grpSpPr>
+        <a:xfrm>
+          <a:off x="0" y="0"/>
+          <a:ext cx="0" cy="0"/>
+          <a:chOff x="0" y="0"/>
+          <a:chExt cx="0" cy="0"/>
+        </a:xfrm>
+      </p:grpSpPr>
+      <p:sp>
+        <p:nvSpPr>
+          <p:cNvPr id="2" name="Text 0"/>
+          <p:cNvSpPr/>
+          <p:nvPr>
+            <p:ph idx="101" type="title" hasCustomPrompt="1"/>
+          </p:nvPr>
+        </p:nvSpPr>
+        <p:spPr>
+          <a:xfrm>
+            <a:off x="1325880" y="347472"/>
+            <a:ext cx="10317175" cy="658368"/>
+          </a:xfrm>
+          <a:prstGeom prst="rect">
+            <a:avLst/>
+          </a:prstGeom>
+          <a:noFill/>
+          <a:ln/>
+        </p:spPr>
+        <p:txBody>
+          <a:bodyPr wrap="square" lIns="0" tIns="0" rIns="0" bIns="0" rtlCol="0" anchor="ctr"/>
+          <a:lstStyle/>
+          <a:p>
+            <a:pPr algn="l" indent="0" marL="0">
+              <a:buNone/>
+            </a:pPr>
+            <a:r>
+              <a:rPr lang="en-US" sz="3000" b="1" dirty="0">
+                <a:solidFill>
+                  <a:srgbClr val="14213D"/>
+                </a:solidFill>
+                <a:latin typeface="Georgia" pitchFamily="34" charset="0"/>
+                <a:ea typeface="Georgia" pitchFamily="34" charset="-122"/>
+                <a:cs typeface="Georgia" pitchFamily="34" charset="-120"/>
+              </a:rPr>
+              <a:t>Kür: der Stromweg</a:t>
+            </a:r>
+            <a:endParaRPr lang="en-US" sz="3000" dirty="0"/>
+          </a:p>
+        </p:txBody>
+      </p:sp>
+      <p:sp>
+        <p:nvSpPr>
+          <p:cNvPr id="3" name="Text 1"/>
+          <p:cNvSpPr txBox="1"/>
+          <p:nvPr/>
+        </p:nvSpPr>
+        <p:spPr>
+          <a:xfrm>
+            <a:off x="548640" y="1325880"/>
+            <a:ext cx="11094415" cy="293624"/>
+          </a:xfrm>
+          <a:prstGeom prst="rect">
+            <a:avLst/>
+          </a:prstGeom>
+          <a:noFill/>
+          <a:ln/>
+        </p:spPr>
+        <p:txBody>
+          <a:bodyPr wrap="square" lIns="0" tIns="0" rIns="0" bIns="0" rtlCol="0" anchor="t"/>
+          <a:lstStyle/>
+          <a:p>
+            <a:pPr algn="l" indent="0" marL="0">
+              <a:buNone/>
+            </a:pPr>
+            <a:r>
+              <a:rPr lang="en-US" sz="1600" dirty="0">
+                <a:solidFill>
+                  <a:srgbClr val="1B1B1F"/>
+                </a:solidFill>
+              </a:rPr>
+              <a:t>Hinweg durchgezogen, Rückweg gestrichelt – die Umkehrwalze schickt den Strom </a:t>
+            </a:r>
+            <a:r>
+              <a:rPr lang="en-US" sz="1600" b="1" dirty="0">
+                <a:solidFill>
+                  <a:srgbClr val="1B1B1F"/>
+                </a:solidFill>
+              </a:rPr>
+              <a:t>auf einem anderen Draht</a:t>
+            </a:r>
+            <a:r>
+              <a:rPr lang="en-US" sz="1600" dirty="0">
+                <a:solidFill>
+                  <a:srgbClr val="1B1B1F"/>
+                </a:solidFill>
+              </a:rPr>
+              <a:t> zurück.</a:t>
+            </a:r>
+            <a:endParaRPr lang="en-US" sz="1600" dirty="0"/>
+          </a:p>
+        </p:txBody>
+      </p:sp>
+      <p:pic>
+        <p:nvPicPr>
+          <p:cNvPr id="4" name="Image 0" descr="bild">    </p:cNvPr>
+          <p:cNvPicPr>
+            <a:picLocks noChangeAspect="1"/>
+          </p:cNvPicPr>
+          <p:nvPr/>
+        </p:nvPicPr>
+        <p:blipFill>
+          <a:blip r:embed="rId1"/>
+          <a:stretch>
+            <a:fillRect/>
+          </a:stretch>
+        </p:blipFill>
+        <p:spPr>
+          <a:xfrm>
+            <a:off x="2712568" y="1747520"/>
+            <a:ext cx="6766560" cy="3806190"/>
+          </a:xfrm>
+          <a:prstGeom prst="rect">
+            <a:avLst/>
+          </a:prstGeom>
+        </p:spPr>
+      </p:pic>
+      <p:sp>
+        <p:nvSpPr>
+          <p:cNvPr id="5" name="Text 2"/>
+          <p:cNvSpPr txBox="1"/>
+          <p:nvPr/>
+        </p:nvSpPr>
+        <p:spPr>
+          <a:xfrm>
+            <a:off x="548640" y="5590286"/>
+            <a:ext cx="11094415" cy="274320"/>
+          </a:xfrm>
+          <a:prstGeom prst="rect">
+            <a:avLst/>
+          </a:prstGeom>
+          <a:noFill/>
+          <a:ln/>
+        </p:spPr>
+        <p:txBody>
+          <a:bodyPr wrap="square" lIns="0" tIns="0" rIns="0" bIns="0" rtlCol="0" anchor="ctr"/>
+          <a:lstStyle/>
+          <a:p>
+            <a:pPr algn="ctr" indent="0" marL="0">
+              <a:buNone/>
+            </a:pPr>
+            <a:r>
+              <a:rPr lang="en-US" sz="1200" i="1" dirty="0">
+                <a:solidFill>
+                  <a:srgbClr val="4A4A55"/>
+                </a:solidFill>
+              </a:rPr>
+              <a:t>Kryptolabor · Ideen von A. Bodendiek (Krypto-Werkstatt)</a:t>
+            </a:r>
+            <a:endParaRPr lang="en-US" sz="1200" dirty="0"/>
+          </a:p>
+        </p:txBody>
+      </p:sp>
+      <p:sp>
+        <p:nvSpPr>
+          <p:cNvPr id="25" name="Slide Number Placeholder 0"/>
+          <p:cNvSpPr>
+            <a:spLocks noGrp="1"/>
+          </p:cNvSpPr>
+          <p:nvPr>
+            <p:ph type="sldNum" sz="quarter" idx="4294967295"/>
+          </p:nvPr>
+        </p:nvSpPr>
+        <p:spPr>
+          <a:xfrm>
+            <a:off x="11155680" y="6419088"/>
+            <a:ext cx="502920" cy="274320"/>
+          </a:xfrm>
+          <a:prstGeom prst="rect">
+            <a:avLst/>
+          </a:prstGeom>
+          <a:extLst>
+            <a:ext uri="{C572A759-6A51-4108-AA02-DFA0A04FC94B}">
+              <ma14:wrappingTextBoxFlag xmlns:ma14="http://schemas.microsoft.com/office/mac/drawingml/2011/main" val="0"/>
+            </a:ext>
+          </a:extLst>
+        </p:spPr>
+        <p:txBody>
+          <a:bodyPr/>
+          <a:lstStyle>
+            <a:lvl1pPr>
+              <a:defRPr sz="1000">
+                <a:solidFill>
+                  <a:srgbClr val="4A4A55"/>
+                </a:solidFill>
+              </a:defRPr>
+            </a:lvl1pPr>
+          </a:lstStyle>
+          <a:p>
+            <a:pPr algn="r"/>
+            <a:fld id="{F7021451-1387-4CA6-816F-3879F97B5CBC}" type="slidenum">
+              <a:rPr b="0" lang="en-US"/>
+              <a:t>30</a:t>
             </a:fld>
             <a:endParaRPr lang="en-US"/>
           </a:p>

--- a/materialien/Welt3_Maschinenzeitalter/1_Praesentation/KR_W3_Praesentation_Maschinenzeitalter.pptx
+++ b/materialien/Welt3_Maschinenzeitalter/1_Praesentation/KR_W3_Praesentation_Maschinenzeitalter.pptx
@@ -136,7 +136,7 @@
   <p:extLst>
     <p:ext uri="{521415D9-36F7-43E2-AB2F-B90AF26B5E84}">
       <p14:sectionLst xmlns:p14="http://schemas.microsoft.com/office/powerpoint/2010/main">
-        <p14:section name="DS 9 · Vernam" id="{47b2d271-b1b5-0bed-f2a5-cfc40bb0afc9}">
+        <p14:section name="DS 9 · Vernam" id="{a632ebe3-1287-b8dd-a164-8db92f446a8e}">
           <p14:sldIdLst>
             <p14:sldId id="256"/>
             <p14:sldId id="257"/>
@@ -152,7 +152,7 @@
             <p14:sldId id="267"/>
           </p14:sldIdLst>
         </p14:section>
-        <p14:section name="DS 10 · Blockchiffre" id="{cd00c5f2-f540-3641-a731-45ab57b348c5}">
+        <p14:section name="DS 10 · Blockchiffre" id="{d495be62-b764-7121-18fa-9bae6612e8aa}">
           <p14:sldIdLst>
             <p14:sldId id="268"/>
             <p14:sldId id="269"/>
@@ -164,7 +164,7 @@
             <p14:sldId id="275"/>
           </p14:sldIdLst>
         </p14:section>
-        <p14:section name="DS 11 · Werkstatt" id="{3bba3509-fdad-216b-ebee-59cac4278596}">
+        <p14:section name="DS 11 · Werkstatt" id="{7026a048-b015-5335-a176-542198758a55}">
           <p14:sldIdLst>
             <p14:sldId id="276"/>
             <p14:sldId id="277"/>
@@ -172,7 +172,7 @@
             <p14:sldId id="279"/>
           </p14:sldIdLst>
         </p14:section>
-        <p14:section name="DS 11 · ADFGVX" id="{4918fe61-7094-8486-af68-b147f3bcd6fa}">
+        <p14:section name="DS 11 · ADFGVX" id="{fe479fab-3162-4177-89ed-e231ae31ac6d}">
           <p14:sldIdLst>
             <p14:sldId id="280"/>
             <p14:sldId id="281"/>
@@ -180,7 +180,7 @@
             <p14:sldId id="283"/>
           </p14:sldIdLst>
         </p14:section>
-        <p14:section name="Kür K2 · Die Enigma" id="{ef5db72b-1cf5-4b10-99b3-ba3fe46377eb}">
+        <p14:section name="Kür K2 · Die Enigma" id="{a37c30b4-dc27-bb89-b088-0fd149394b4a}">
           <p14:sldIdLst>
             <p14:sldId id="284"/>
             <p14:sldId id="285"/>
@@ -28915,8 +28915,8 @@
         </p:blipFill>
         <p:spPr>
           <a:xfrm>
-            <a:off x="2712568" y="1747520"/>
-            <a:ext cx="6766560" cy="3806190"/>
+            <a:off x="4422353" y="1747520"/>
+            <a:ext cx="3346990" cy="3886200"/>
           </a:xfrm>
           <a:prstGeom prst="rect">
             <a:avLst/>
@@ -28931,7 +28931,7 @@
         </p:nvSpPr>
         <p:spPr>
           <a:xfrm>
-            <a:off x="548640" y="5590286"/>
+            <a:off x="548640" y="5670296"/>
             <a:ext cx="11094415" cy="274320"/>
           </a:xfrm>
           <a:prstGeom prst="rect">
@@ -31299,8 +31299,8 @@
         </p:blipFill>
         <p:spPr>
           <a:xfrm>
-            <a:off x="2712568" y="1747520"/>
-            <a:ext cx="6766560" cy="3806190"/>
+            <a:off x="3408760" y="1747520"/>
+            <a:ext cx="5374175" cy="3886200"/>
           </a:xfrm>
           <a:prstGeom prst="rect">
             <a:avLst/>
@@ -31315,7 +31315,7 @@
         </p:nvSpPr>
         <p:spPr>
           <a:xfrm>
-            <a:off x="548640" y="5590286"/>
+            <a:off x="548640" y="5670296"/>
             <a:ext cx="11094415" cy="274320"/>
           </a:xfrm>
           <a:prstGeom prst="rect">
